--- a/2-seances/S09-et-ou/a-projeter/seance-9-projection.pptx
+++ b/2-seances/S09-et-ou/a-projeter/seance-9-projection.pptx
@@ -4157,7 +4157,7 @@
                 <a:ea typeface="Calibri" pitchFamily="34" charset="-122"/>
                 <a:cs typeface="Calibri" pitchFamily="34" charset="-120"/>
               </a:rPr>
-              <a:t>Le même jeu, en deux fois moins de lignes.</a:t>
+              <a:t>La même décision, en deux fois moins de lignes.</a:t>
             </a:r>
             <a:endParaRPr lang="en-US" sz="3600" dirty="0"/>
           </a:p>
@@ -8865,7 +8865,7 @@
                 <a:ea typeface="Calibri" pitchFamily="34" charset="-122"/>
                 <a:cs typeface="Calibri" pitchFamily="34" charset="-120"/>
               </a:rPr>
-              <a:t>Combien d'espaces pour le if dans le if ?</a:t>
+              <a:t>Combien d'espaces devant le 2e if, puis devant son print ?</a:t>
             </a:r>
             <a:endParaRPr lang="en-US" sz="1500" dirty="0"/>
           </a:p>
@@ -8997,7 +8997,7 @@
                 <a:ea typeface="Calibri" pitchFamily="34" charset="-122"/>
                 <a:cs typeface="Calibri" pitchFamily="34" charset="-120"/>
               </a:rPr>
-              <a:t>Si je tape 0, que fait le jeu de la séance 7 ?</a:t>
+              <a:t>Si je tape 0, que DIT le jeu de la séance 7 ?</a:t>
             </a:r>
             <a:endParaRPr lang="en-US" sz="1500" dirty="0"/>
           </a:p>
@@ -10064,7 +10064,7 @@
                 <a:ea typeface="Calibri" pitchFamily="34" charset="-122"/>
                 <a:cs typeface="Calibri" pitchFamily="34" charset="-120"/>
               </a:rPr>
-              <a:t>8</a:t>
+              <a:t>4, puis 8</a:t>
             </a:r>
             <a:endParaRPr lang="en-US" sz="1500" dirty="0"/>
           </a:p>
@@ -10196,7 +10196,7 @@
                 <a:ea typeface="Calibri" pitchFamily="34" charset="-122"/>
                 <a:cs typeface="Calibri" pitchFamily="34" charset="-120"/>
               </a:rPr>
-              <a:t>il pose dans la case 9 — le bug</a:t>
+              <a:t>« la case 0 est déjà prise » — et c'est faux</a:t>
             </a:r>
             <a:endParaRPr lang="en-US" sz="1500" dirty="0"/>
           </a:p>
@@ -10780,7 +10780,7 @@
                 <a:ea typeface="Calibri" pitchFamily="34" charset="-122"/>
                 <a:cs typeface="Calibri" pitchFamily="34" charset="-120"/>
               </a:rPr>
-              <a:t>Vous aviez trouvé ce bug.</a:t>
+              <a:t>« La case 0 est déjà prise. »</a:t>
             </a:r>
             <a:endParaRPr lang="en-US" sz="3200" dirty="0"/>
           </a:p>
@@ -10800,7 +10800,7 @@
                 <a:ea typeface="Calibri" pitchFamily="34" charset="-122"/>
                 <a:cs typeface="Calibri" pitchFamily="34" charset="-120"/>
               </a:rPr>
-              <a:t>Aujourd'hui, on le répare —</a:t>
+              <a:t>C'est FAUX.</a:t>
             </a:r>
             <a:endParaRPr lang="en-US" sz="3200" dirty="0"/>
           </a:p>
@@ -10820,7 +10820,7 @@
                 <a:ea typeface="Calibri" pitchFamily="34" charset="-122"/>
                 <a:cs typeface="Calibri" pitchFamily="34" charset="-120"/>
               </a:rPr>
-              <a:t>et le code va rétrécir.</a:t>
+              <a:t>Aujourd'hui, on le répare pour de bon.</a:t>
             </a:r>
             <a:endParaRPr lang="en-US" sz="3200" dirty="0"/>
           </a:p>
@@ -10862,7 +10862,7 @@
                 <a:ea typeface="Calibri" pitchFamily="34" charset="-122"/>
                 <a:cs typeface="Calibri" pitchFamily="34" charset="-120"/>
               </a:rPr>
-              <a:t>Tapez 0 dans le jeu de la séance 7 : le symbole se pose dans la case 9.</a:t>
+              <a:t>Tapez 0 dans le jeu de la séance 7. Personne n'a jamais joué la case 0 — elle n'existe même pas. Le jeu refuse par accident, et il ment.</a:t>
             </a:r>
             <a:endParaRPr lang="en-US" sz="1900" dirty="0"/>
           </a:p>
